--- a/6713_pre_final.pptx
+++ b/6713_pre_final.pptx
@@ -2079,7 +2079,7 @@
                 <a:ea typeface="Calibri" pitchFamily="34" charset="-122"/>
                 <a:cs typeface="Calibri" pitchFamily="34" charset="-120"/>
               </a:rPr>
-              <a:t>Yuyi Zhu · Songning Liu · Ian Zhao · Wanxin Ma · Muyi Yang
+              <a:t>Yuyi Zhu · Ian Zhao · Songning Liu · Wanxin Ma · Muyi Yang
 </a:t>
             </a:r>
             <a:r>
